--- a/Day 01/D01_01_Materials/Day 01 - SQL Foundations.pptx
+++ b/Day 01/D01_01_Materials/Day 01 - SQL Foundations.pptx
@@ -3395,7 +3395,7 @@
         <p:spPr>
           <a:xfrm>
             <a:off x="548640" y="777240"/>
-            <a:ext cx="10515600" cy="1005840"/>
+            <a:ext cx="10515600" cy="704088"/>
           </a:xfrm>
           <a:prstGeom prst="rect">
             <a:avLst/>
@@ -3428,7 +3428,7 @@
         </p:nvSpPr>
         <p:spPr>
           <a:xfrm>
-            <a:off x="548640" y="1600200"/>
+            <a:off x="548640" y="1481328"/>
             <a:ext cx="10515600" cy="457200"/>
           </a:xfrm>
           <a:prstGeom prst="rect">
@@ -4391,7 +4391,7 @@
         <p:spPr>
           <a:xfrm>
             <a:off x="548640" y="777240"/>
-            <a:ext cx="10515600" cy="1005840"/>
+            <a:ext cx="10515600" cy="704088"/>
           </a:xfrm>
           <a:prstGeom prst="rect">
             <a:avLst/>
@@ -4424,7 +4424,7 @@
         </p:nvSpPr>
         <p:spPr>
           <a:xfrm>
-            <a:off x="548640" y="1600200"/>
+            <a:off x="548640" y="1481328"/>
             <a:ext cx="10515600" cy="457200"/>
           </a:xfrm>
           <a:prstGeom prst="rect">
@@ -5089,7 +5089,7 @@
         <p:spPr>
           <a:xfrm>
             <a:off x="548640" y="777240"/>
-            <a:ext cx="10515600" cy="1005840"/>
+            <a:ext cx="10515600" cy="704088"/>
           </a:xfrm>
           <a:prstGeom prst="rect">
             <a:avLst/>
@@ -5122,7 +5122,7 @@
         </p:nvSpPr>
         <p:spPr>
           <a:xfrm>
-            <a:off x="548640" y="1600200"/>
+            <a:off x="548640" y="1481328"/>
             <a:ext cx="10515600" cy="457200"/>
           </a:xfrm>
           <a:prstGeom prst="rect">
@@ -5997,7 +5997,7 @@
         <p:spPr>
           <a:xfrm>
             <a:off x="548640" y="777240"/>
-            <a:ext cx="10515600" cy="1005840"/>
+            <a:ext cx="10515600" cy="704088"/>
           </a:xfrm>
           <a:prstGeom prst="rect">
             <a:avLst/>
@@ -6030,7 +6030,7 @@
         </p:nvSpPr>
         <p:spPr>
           <a:xfrm>
-            <a:off x="548640" y="1600200"/>
+            <a:off x="548640" y="1481328"/>
             <a:ext cx="10515600" cy="457200"/>
           </a:xfrm>
           <a:prstGeom prst="rect">
@@ -6780,7 +6780,7 @@
         <p:spPr>
           <a:xfrm>
             <a:off x="548640" y="777240"/>
-            <a:ext cx="10515600" cy="1005840"/>
+            <a:ext cx="10515600" cy="704088"/>
           </a:xfrm>
           <a:prstGeom prst="rect">
             <a:avLst/>
@@ -6813,7 +6813,7 @@
         </p:nvSpPr>
         <p:spPr>
           <a:xfrm>
-            <a:off x="548640" y="1600200"/>
+            <a:off x="548640" y="1481328"/>
             <a:ext cx="10515600" cy="457200"/>
           </a:xfrm>
           <a:prstGeom prst="rect">
@@ -7785,7 +7785,7 @@
         <p:spPr>
           <a:xfrm>
             <a:off x="548640" y="777240"/>
-            <a:ext cx="10515600" cy="1005840"/>
+            <a:ext cx="10515600" cy="704088"/>
           </a:xfrm>
           <a:prstGeom prst="rect">
             <a:avLst/>
@@ -7818,7 +7818,7 @@
         </p:nvSpPr>
         <p:spPr>
           <a:xfrm>
-            <a:off x="548640" y="1600200"/>
+            <a:off x="548640" y="1481328"/>
             <a:ext cx="10515600" cy="457200"/>
           </a:xfrm>
           <a:prstGeom prst="rect">
@@ -8715,7 +8715,7 @@
         <p:spPr>
           <a:xfrm>
             <a:off x="548640" y="777240"/>
-            <a:ext cx="10515600" cy="1005840"/>
+            <a:ext cx="10515600" cy="704088"/>
           </a:xfrm>
           <a:prstGeom prst="rect">
             <a:avLst/>
@@ -8748,7 +8748,7 @@
         </p:nvSpPr>
         <p:spPr>
           <a:xfrm>
-            <a:off x="548640" y="1600200"/>
+            <a:off x="548640" y="1481328"/>
             <a:ext cx="10515600" cy="457200"/>
           </a:xfrm>
           <a:prstGeom prst="rect">
@@ -9428,7 +9428,7 @@
         <p:spPr>
           <a:xfrm>
             <a:off x="548640" y="777240"/>
-            <a:ext cx="10515600" cy="1005840"/>
+            <a:ext cx="10515600" cy="704088"/>
           </a:xfrm>
           <a:prstGeom prst="rect">
             <a:avLst/>
@@ -9461,7 +9461,7 @@
         </p:nvSpPr>
         <p:spPr>
           <a:xfrm>
-            <a:off x="548640" y="1600200"/>
+            <a:off x="548640" y="1481328"/>
             <a:ext cx="10515600" cy="457200"/>
           </a:xfrm>
           <a:prstGeom prst="rect">
@@ -10473,7 +10473,7 @@
         <p:spPr>
           <a:xfrm>
             <a:off x="548640" y="777240"/>
-            <a:ext cx="10515600" cy="1005840"/>
+            <a:ext cx="10515600" cy="704088"/>
           </a:xfrm>
           <a:prstGeom prst="rect">
             <a:avLst/>
@@ -10506,7 +10506,7 @@
         </p:nvSpPr>
         <p:spPr>
           <a:xfrm>
-            <a:off x="548640" y="1600200"/>
+            <a:off x="548640" y="1481328"/>
             <a:ext cx="10515600" cy="457200"/>
           </a:xfrm>
           <a:prstGeom prst="rect">
@@ -11640,7 +11640,7 @@
         <p:spPr>
           <a:xfrm>
             <a:off x="548640" y="777240"/>
-            <a:ext cx="10515600" cy="1005840"/>
+            <a:ext cx="10515600" cy="704088"/>
           </a:xfrm>
           <a:prstGeom prst="rect">
             <a:avLst/>
@@ -11673,7 +11673,7 @@
         </p:nvSpPr>
         <p:spPr>
           <a:xfrm>
-            <a:off x="548640" y="1600200"/>
+            <a:off x="548640" y="1481328"/>
             <a:ext cx="10515600" cy="457200"/>
           </a:xfrm>
           <a:prstGeom prst="rect">
@@ -12970,7 +12970,7 @@
         <p:spPr>
           <a:xfrm>
             <a:off x="548640" y="777240"/>
-            <a:ext cx="10515600" cy="1005840"/>
+            <a:ext cx="10515600" cy="704088"/>
           </a:xfrm>
           <a:prstGeom prst="rect">
             <a:avLst/>
@@ -13003,7 +13003,7 @@
         </p:nvSpPr>
         <p:spPr>
           <a:xfrm>
-            <a:off x="548640" y="1600200"/>
+            <a:off x="548640" y="1481328"/>
             <a:ext cx="10515600" cy="457200"/>
           </a:xfrm>
           <a:prstGeom prst="rect">
@@ -13517,7 +13517,7 @@
         <p:spPr>
           <a:xfrm>
             <a:off x="548640" y="777240"/>
-            <a:ext cx="10515600" cy="1005840"/>
+            <a:ext cx="10515600" cy="704088"/>
           </a:xfrm>
           <a:prstGeom prst="rect">
             <a:avLst/>
@@ -13550,7 +13550,7 @@
         </p:nvSpPr>
         <p:spPr>
           <a:xfrm>
-            <a:off x="548640" y="1600200"/>
+            <a:off x="548640" y="1481328"/>
             <a:ext cx="10515600" cy="457200"/>
           </a:xfrm>
           <a:prstGeom prst="rect">
@@ -14180,7 +14180,7 @@
         <p:spPr>
           <a:xfrm>
             <a:off x="548640" y="777240"/>
-            <a:ext cx="10515600" cy="1005840"/>
+            <a:ext cx="10515600" cy="704088"/>
           </a:xfrm>
           <a:prstGeom prst="rect">
             <a:avLst/>
@@ -15422,7 +15422,7 @@
         <p:spPr>
           <a:xfrm>
             <a:off x="548640" y="777240"/>
-            <a:ext cx="10515600" cy="1005840"/>
+            <a:ext cx="10515600" cy="704088"/>
           </a:xfrm>
           <a:prstGeom prst="rect">
             <a:avLst/>
@@ -15455,7 +15455,7 @@
         </p:nvSpPr>
         <p:spPr>
           <a:xfrm>
-            <a:off x="548640" y="1600200"/>
+            <a:off x="548640" y="1481328"/>
             <a:ext cx="10515600" cy="457200"/>
           </a:xfrm>
           <a:prstGeom prst="rect">
@@ -16383,7 +16383,7 @@
         <p:spPr>
           <a:xfrm>
             <a:off x="548640" y="777240"/>
-            <a:ext cx="10515600" cy="1005840"/>
+            <a:ext cx="10515600" cy="704088"/>
           </a:xfrm>
           <a:prstGeom prst="rect">
             <a:avLst/>
@@ -16416,7 +16416,7 @@
         </p:nvSpPr>
         <p:spPr>
           <a:xfrm>
-            <a:off x="548640" y="1600200"/>
+            <a:off x="548640" y="1481328"/>
             <a:ext cx="10515600" cy="457200"/>
           </a:xfrm>
           <a:prstGeom prst="rect">
@@ -18228,7 +18228,7 @@
         <p:spPr>
           <a:xfrm>
             <a:off x="548640" y="777240"/>
-            <a:ext cx="10515600" cy="1005840"/>
+            <a:ext cx="10515600" cy="704088"/>
           </a:xfrm>
           <a:prstGeom prst="rect">
             <a:avLst/>
@@ -18261,7 +18261,7 @@
         </p:nvSpPr>
         <p:spPr>
           <a:xfrm>
-            <a:off x="548640" y="1600200"/>
+            <a:off x="548640" y="1481328"/>
             <a:ext cx="10515600" cy="457200"/>
           </a:xfrm>
           <a:prstGeom prst="rect">
@@ -18927,7 +18927,7 @@
         <p:spPr>
           <a:xfrm>
             <a:off x="548640" y="777240"/>
-            <a:ext cx="10515600" cy="1005840"/>
+            <a:ext cx="10515600" cy="704088"/>
           </a:xfrm>
           <a:prstGeom prst="rect">
             <a:avLst/>
@@ -18960,7 +18960,7 @@
         </p:nvSpPr>
         <p:spPr>
           <a:xfrm>
-            <a:off x="548640" y="1600200"/>
+            <a:off x="548640" y="1481328"/>
             <a:ext cx="10515600" cy="457200"/>
           </a:xfrm>
           <a:prstGeom prst="rect">

--- a/Day 01/D01_01_Materials/Day 01 - SQL Foundations.pptx
+++ b/Day 01/D01_01_Materials/Day 01 - SQL Foundations.pptx
@@ -4459,7 +4459,7 @@
         <p:spPr>
           <a:xfrm>
             <a:off x="548640" y="2468880"/>
-            <a:ext cx="5212080" cy="960120"/>
+            <a:ext cx="5212080" cy="1325879"/>
           </a:xfrm>
           <a:prstGeom prst="roundRect">
             <a:avLst>
@@ -4541,7 +4541,7 @@
         <p:spPr>
           <a:xfrm>
             <a:off x="822960" y="2999232"/>
-            <a:ext cx="4663440" cy="365760"/>
+            <a:ext cx="4663440" cy="685799"/>
           </a:xfrm>
           <a:prstGeom prst="rect">
             <a:avLst/>
@@ -4574,8 +4574,8 @@
         </p:nvSpPr>
         <p:spPr>
           <a:xfrm>
-            <a:off x="548640" y="3630168"/>
-            <a:ext cx="5212080" cy="960120"/>
+            <a:off x="548640" y="3995927"/>
+            <a:ext cx="5212080" cy="1106424"/>
           </a:xfrm>
           <a:prstGeom prst="roundRect">
             <a:avLst>
@@ -4622,7 +4622,7 @@
         </p:nvSpPr>
         <p:spPr>
           <a:xfrm>
-            <a:off x="822960" y="3767328"/>
+            <a:off x="822960" y="4133087"/>
             <a:ext cx="4663440" cy="365760"/>
           </a:xfrm>
           <a:prstGeom prst="rect">
@@ -4656,8 +4656,8 @@
         </p:nvSpPr>
         <p:spPr>
           <a:xfrm>
-            <a:off x="822960" y="4160520"/>
-            <a:ext cx="4663440" cy="365760"/>
+            <a:off x="822960" y="4526279"/>
+            <a:ext cx="4663440" cy="466344"/>
           </a:xfrm>
           <a:prstGeom prst="rect">
             <a:avLst/>
@@ -4690,8 +4690,8 @@
         </p:nvSpPr>
         <p:spPr>
           <a:xfrm>
-            <a:off x="548640" y="4791456"/>
-            <a:ext cx="5212080" cy="960120"/>
+            <a:off x="548640" y="5303519"/>
+            <a:ext cx="5212080" cy="1325879"/>
           </a:xfrm>
           <a:prstGeom prst="roundRect">
             <a:avLst>
@@ -4738,7 +4738,7 @@
         </p:nvSpPr>
         <p:spPr>
           <a:xfrm>
-            <a:off x="822960" y="4928616"/>
+            <a:off x="822960" y="5440679"/>
             <a:ext cx="4663440" cy="365760"/>
           </a:xfrm>
           <a:prstGeom prst="rect">
@@ -4772,8 +4772,8 @@
         </p:nvSpPr>
         <p:spPr>
           <a:xfrm>
-            <a:off x="822960" y="5321808"/>
-            <a:ext cx="4663440" cy="365760"/>
+            <a:off x="822960" y="5833871"/>
+            <a:ext cx="4663440" cy="685799"/>
           </a:xfrm>
           <a:prstGeom prst="rect">
             <a:avLst/>
@@ -4807,7 +4807,7 @@
         <p:spPr>
           <a:xfrm>
             <a:off x="6062472" y="2468880"/>
-            <a:ext cx="5577840" cy="3282696"/>
+            <a:ext cx="5577840" cy="4160518"/>
           </a:xfrm>
           <a:prstGeom prst="roundRect">
             <a:avLst>
@@ -4887,7 +4887,7 @@
         <p:spPr>
           <a:xfrm>
             <a:off x="6382512" y="3200400"/>
-            <a:ext cx="4937760" cy="2276856"/>
+            <a:ext cx="4937760" cy="3154678"/>
           </a:xfrm>
           <a:prstGeom prst="rect">
             <a:avLst/>
@@ -13038,7 +13038,7 @@
         <p:spPr>
           <a:xfrm>
             <a:off x="548640" y="2468880"/>
-            <a:ext cx="10881360" cy="960120"/>
+            <a:ext cx="10881360" cy="1106424"/>
           </a:xfrm>
           <a:prstGeom prst="roundRect">
             <a:avLst>
@@ -13120,7 +13120,7 @@
         <p:spPr>
           <a:xfrm>
             <a:off x="822960" y="2999232"/>
-            <a:ext cx="10332720" cy="365760"/>
+            <a:ext cx="10332720" cy="466344"/>
           </a:xfrm>
           <a:prstGeom prst="rect">
             <a:avLst/>
@@ -13153,8 +13153,8 @@
         </p:nvSpPr>
         <p:spPr>
           <a:xfrm>
-            <a:off x="548640" y="3630168"/>
-            <a:ext cx="10881360" cy="960120"/>
+            <a:off x="548640" y="3776472"/>
+            <a:ext cx="10881360" cy="1106424"/>
           </a:xfrm>
           <a:prstGeom prst="roundRect">
             <a:avLst>
@@ -13201,7 +13201,7 @@
         </p:nvSpPr>
         <p:spPr>
           <a:xfrm>
-            <a:off x="822960" y="3767328"/>
+            <a:off x="822960" y="3913632"/>
             <a:ext cx="10332720" cy="365760"/>
           </a:xfrm>
           <a:prstGeom prst="rect">
@@ -13235,8 +13235,8 @@
         </p:nvSpPr>
         <p:spPr>
           <a:xfrm>
-            <a:off x="822960" y="4160520"/>
-            <a:ext cx="10332720" cy="365760"/>
+            <a:off x="822960" y="4306824"/>
+            <a:ext cx="10332720" cy="466344"/>
           </a:xfrm>
           <a:prstGeom prst="rect">
             <a:avLst/>
@@ -13269,8 +13269,8 @@
         </p:nvSpPr>
         <p:spPr>
           <a:xfrm>
-            <a:off x="548640" y="4791456"/>
-            <a:ext cx="10881360" cy="960120"/>
+            <a:off x="548640" y="5084064"/>
+            <a:ext cx="10881360" cy="1106424"/>
           </a:xfrm>
           <a:prstGeom prst="roundRect">
             <a:avLst>
@@ -13317,7 +13317,7 @@
         </p:nvSpPr>
         <p:spPr>
           <a:xfrm>
-            <a:off x="822960" y="4928616"/>
+            <a:off x="822960" y="5221224"/>
             <a:ext cx="10332720" cy="365760"/>
           </a:xfrm>
           <a:prstGeom prst="rect">
@@ -13351,8 +13351,8 @@
         </p:nvSpPr>
         <p:spPr>
           <a:xfrm>
-            <a:off x="822960" y="5321808"/>
-            <a:ext cx="10332720" cy="365760"/>
+            <a:off x="822960" y="5614416"/>
+            <a:ext cx="10332720" cy="466344"/>
           </a:xfrm>
           <a:prstGeom prst="rect">
             <a:avLst/>
